--- a/Slides/special project slides.pptx
+++ b/Slides/special project slides.pptx
@@ -122,6 +122,11 @@
       </a:defRPr>
     </a:lvl9pPr>
   </p:defaultTextStyle>
+  <p:extLst>
+    <p:ext uri="{EFAFB233-063F-42B5-8137-9DF3F51BA10A}">
+      <p15:sldGuideLst xmlns:p15="http://schemas.microsoft.com/office/powerpoint/2012/main"/>
+    </p:ext>
+  </p:extLst>
 </p:presentation>
 </file>
 
@@ -3378,17 +3383,19 @@
         </p:nvSpPr>
         <p:spPr>
           <a:xfrm>
-            <a:off x="1524000" y="493099"/>
-            <a:ext cx="9144000" cy="932579"/>
+            <a:off x="275302" y="163720"/>
+            <a:ext cx="11641395" cy="1360279"/>
           </a:xfrm>
         </p:spPr>
         <p:txBody>
-          <a:bodyPr/>
-          <a:lstStyle/>
-          <a:p>
-            <a:r>
-              <a:rPr lang="en-GB" dirty="0"/>
-              <a:t>Hacking a website</a:t>
+          <a:bodyPr>
+            <a:noAutofit/>
+          </a:bodyPr>
+          <a:lstStyle/>
+          <a:p>
+            <a:r>
+              <a:rPr lang="en-GB" sz="4400" dirty="0"/>
+              <a:t>Website security – through exploiting vulnerabilities</a:t>
             </a:r>
           </a:p>
         </p:txBody>
@@ -3456,7 +3463,7 @@
               <a:buChar char="•"/>
             </a:pPr>
             <a:r>
-              <a:rPr lang="en-GB" dirty="0"/>
+              <a:rPr lang="en-GB" b="1" dirty="0"/>
               <a:t>You cannot open the folder called “restricted” and you cannot use inspect element.</a:t>
             </a:r>
           </a:p>
@@ -3488,7 +3495,7 @@
         </p:nvSpPr>
         <p:spPr>
           <a:xfrm>
-            <a:off x="1524000" y="1425679"/>
+            <a:off x="1524000" y="1523999"/>
             <a:ext cx="9144000" cy="698090"/>
           </a:xfrm>
           <a:prstGeom prst="rect">
@@ -3497,7 +3504,7 @@
         </p:spPr>
         <p:txBody>
           <a:bodyPr vert="horz" lIns="91440" tIns="45720" rIns="91440" bIns="45720" rtlCol="0" anchor="b">
-            <a:normAutofit lnSpcReduction="10000"/>
+            <a:normAutofit/>
           </a:bodyPr>
           <a:lstStyle>
             <a:lvl1pPr algn="ctr" defTabSz="914400" rtl="0" eaLnBrk="1" latinLnBrk="0" hangingPunct="1">
@@ -3520,7 +3527,7 @@
           </a:lstStyle>
           <a:p>
             <a:r>
-              <a:rPr lang="en-GB" sz="4400" dirty="0"/>
+              <a:rPr lang="en-GB" sz="2800" dirty="0"/>
               <a:t>Special project</a:t>
             </a:r>
           </a:p>
@@ -3698,7 +3705,7 @@
         </p:spPr>
         <p:txBody>
           <a:bodyPr>
-            <a:normAutofit lnSpcReduction="10000"/>
+            <a:normAutofit/>
           </a:bodyPr>
           <a:lstStyle/>
           <a:p>
@@ -3734,13 +3741,9 @@
               <a:rPr lang="en-GB" sz="1800" dirty="0"/>
               <a:t> – search bar</a:t>
             </a:r>
+          </a:p>
+          <a:p>
             <a:endParaRPr lang="en-GB" sz="1800" u="sng" dirty="0"/>
-          </a:p>
-          <a:p>
-            <a:r>
-              <a:rPr lang="en-GB" sz="1800" dirty="0"/>
-              <a:t>Front end:</a:t>
-            </a:r>
           </a:p>
           <a:p>
             <a:r>
@@ -3768,12 +3771,6 @@
           </a:p>
           <a:p>
             <a:endParaRPr lang="en-GB" sz="1800" dirty="0"/>
-          </a:p>
-          <a:p>
-            <a:r>
-              <a:rPr lang="en-GB" sz="1800" dirty="0"/>
-              <a:t>Injection: ‘’ UNION SELECT username, password FROM users</a:t>
-            </a:r>
           </a:p>
           <a:p>
             <a:r>
@@ -3853,7 +3850,7 @@
         </p:blipFill>
         <p:spPr>
           <a:xfrm>
-            <a:off x="5574890" y="4368256"/>
+            <a:off x="5574890" y="4496011"/>
             <a:ext cx="5372383" cy="803511"/>
           </a:xfrm>
           <a:prstGeom prst="rect">
@@ -4047,8 +4044,8 @@
         </p:blipFill>
         <p:spPr>
           <a:xfrm>
-            <a:off x="7817022" y="157317"/>
-            <a:ext cx="4161124" cy="2366408"/>
+            <a:off x="7082631" y="157317"/>
+            <a:ext cx="4895515" cy="2784052"/>
           </a:xfrm>
           <a:prstGeom prst="rect">
             <a:avLst/>
@@ -4781,7 +4778,15 @@
           <a:p>
             <a:r>
               <a:rPr lang="en-GB" sz="1600" b="1" dirty="0"/>
-              <a:t>Using the form from the Tier page on the website, try to delete the table called ‘users’</a:t>
+              <a:t>Using the form from the </a:t>
+            </a:r>
+            <a:r>
+              <a:rPr lang="en-GB" sz="1600" b="1"/>
+              <a:t>Tier page, </a:t>
+            </a:r>
+            <a:r>
+              <a:rPr lang="en-GB" sz="1600" b="1" dirty="0"/>
+              <a:t>try to delete the table called ‘users’</a:t>
             </a:r>
             <a:endParaRPr lang="en-GB" sz="1600" dirty="0"/>
           </a:p>
@@ -5733,14 +5738,19 @@
             <p:ph type="title"/>
           </p:nvPr>
         </p:nvSpPr>
-        <p:spPr/>
+        <p:spPr>
+          <a:xfrm>
+            <a:off x="838199" y="365125"/>
+            <a:ext cx="11019503" cy="1325563"/>
+          </a:xfrm>
+        </p:spPr>
         <p:txBody>
           <a:bodyPr/>
           <a:lstStyle/>
           <a:p>
             <a:r>
               <a:rPr lang="en-GB" dirty="0"/>
-              <a:t>Task Two – URL Parameters</a:t>
+              <a:t>Task Two – URL Parameters (Query parameters)</a:t>
             </a:r>
           </a:p>
         </p:txBody>

--- a/Slides/special project slides.pptx
+++ b/Slides/special project slides.pptx
@@ -279,7 +279,7 @@
           <a:p>
             <a:fld id="{26EFE7FD-1A71-48BA-9779-CB24C9E5229F}" type="datetimeFigureOut">
               <a:rPr lang="en-GB" smtClean="0"/>
-              <a:t>12/03/2026</a:t>
+              <a:t>16/03/2026</a:t>
             </a:fld>
             <a:endParaRPr lang="en-GB"/>
           </a:p>
@@ -479,7 +479,7 @@
           <a:p>
             <a:fld id="{26EFE7FD-1A71-48BA-9779-CB24C9E5229F}" type="datetimeFigureOut">
               <a:rPr lang="en-GB" smtClean="0"/>
-              <a:t>12/03/2026</a:t>
+              <a:t>16/03/2026</a:t>
             </a:fld>
             <a:endParaRPr lang="en-GB"/>
           </a:p>
@@ -689,7 +689,7 @@
           <a:p>
             <a:fld id="{26EFE7FD-1A71-48BA-9779-CB24C9E5229F}" type="datetimeFigureOut">
               <a:rPr lang="en-GB" smtClean="0"/>
-              <a:t>12/03/2026</a:t>
+              <a:t>16/03/2026</a:t>
             </a:fld>
             <a:endParaRPr lang="en-GB"/>
           </a:p>
@@ -889,7 +889,7 @@
           <a:p>
             <a:fld id="{26EFE7FD-1A71-48BA-9779-CB24C9E5229F}" type="datetimeFigureOut">
               <a:rPr lang="en-GB" smtClean="0"/>
-              <a:t>12/03/2026</a:t>
+              <a:t>16/03/2026</a:t>
             </a:fld>
             <a:endParaRPr lang="en-GB"/>
           </a:p>
@@ -1165,7 +1165,7 @@
           <a:p>
             <a:fld id="{26EFE7FD-1A71-48BA-9779-CB24C9E5229F}" type="datetimeFigureOut">
               <a:rPr lang="en-GB" smtClean="0"/>
-              <a:t>12/03/2026</a:t>
+              <a:t>16/03/2026</a:t>
             </a:fld>
             <a:endParaRPr lang="en-GB"/>
           </a:p>
@@ -1433,7 +1433,7 @@
           <a:p>
             <a:fld id="{26EFE7FD-1A71-48BA-9779-CB24C9E5229F}" type="datetimeFigureOut">
               <a:rPr lang="en-GB" smtClean="0"/>
-              <a:t>12/03/2026</a:t>
+              <a:t>16/03/2026</a:t>
             </a:fld>
             <a:endParaRPr lang="en-GB"/>
           </a:p>
@@ -1848,7 +1848,7 @@
           <a:p>
             <a:fld id="{26EFE7FD-1A71-48BA-9779-CB24C9E5229F}" type="datetimeFigureOut">
               <a:rPr lang="en-GB" smtClean="0"/>
-              <a:t>12/03/2026</a:t>
+              <a:t>16/03/2026</a:t>
             </a:fld>
             <a:endParaRPr lang="en-GB"/>
           </a:p>
@@ -1990,7 +1990,7 @@
           <a:p>
             <a:fld id="{26EFE7FD-1A71-48BA-9779-CB24C9E5229F}" type="datetimeFigureOut">
               <a:rPr lang="en-GB" smtClean="0"/>
-              <a:t>12/03/2026</a:t>
+              <a:t>16/03/2026</a:t>
             </a:fld>
             <a:endParaRPr lang="en-GB"/>
           </a:p>
@@ -2103,7 +2103,7 @@
           <a:p>
             <a:fld id="{26EFE7FD-1A71-48BA-9779-CB24C9E5229F}" type="datetimeFigureOut">
               <a:rPr lang="en-GB" smtClean="0"/>
-              <a:t>12/03/2026</a:t>
+              <a:t>16/03/2026</a:t>
             </a:fld>
             <a:endParaRPr lang="en-GB"/>
           </a:p>
@@ -2416,7 +2416,7 @@
           <a:p>
             <a:fld id="{26EFE7FD-1A71-48BA-9779-CB24C9E5229F}" type="datetimeFigureOut">
               <a:rPr lang="en-GB" smtClean="0"/>
-              <a:t>12/03/2026</a:t>
+              <a:t>16/03/2026</a:t>
             </a:fld>
             <a:endParaRPr lang="en-GB"/>
           </a:p>
@@ -2705,7 +2705,7 @@
           <a:p>
             <a:fld id="{26EFE7FD-1A71-48BA-9779-CB24C9E5229F}" type="datetimeFigureOut">
               <a:rPr lang="en-GB" smtClean="0"/>
-              <a:t>12/03/2026</a:t>
+              <a:t>16/03/2026</a:t>
             </a:fld>
             <a:endParaRPr lang="en-GB"/>
           </a:p>
@@ -2948,7 +2948,7 @@
           <a:p>
             <a:fld id="{26EFE7FD-1A71-48BA-9779-CB24C9E5229F}" type="datetimeFigureOut">
               <a:rPr lang="en-GB" smtClean="0"/>
-              <a:t>12/03/2026</a:t>
+              <a:t>16/03/2026</a:t>
             </a:fld>
             <a:endParaRPr lang="en-GB"/>
           </a:p>
@@ -4179,7 +4179,7 @@
         <p:spPr>
           <a:xfrm>
             <a:off x="169441" y="1825625"/>
-            <a:ext cx="8315798" cy="4351338"/>
+            <a:ext cx="8432494" cy="2303923"/>
           </a:xfrm>
         </p:spPr>
         <p:txBody>
@@ -4190,7 +4190,7 @@
           <a:p>
             <a:r>
               <a:rPr lang="en-GB" sz="1600" dirty="0"/>
-              <a:t>SELECT * FROM users WHERE email = ‘</a:t>
+              <a:t>SELECT * FROM users WHERE username = ‘</a:t>
             </a:r>
             <a:r>
               <a:rPr lang="en-GB" sz="1600" dirty="0">
@@ -4220,19 +4220,26 @@
           <a:p>
             <a:r>
               <a:rPr lang="en-GB" sz="1600" dirty="0"/>
-              <a:t>From the example “ </a:t>
-            </a:r>
-            <a:r>
-              <a:rPr lang="en-GB" sz="1600" dirty="0">
+              <a:t>Your injection will be appended to the query at this point:</a:t>
+            </a:r>
+          </a:p>
+          <a:p>
+            <a:pPr lvl="1"/>
+            <a:r>
+              <a:rPr lang="en-GB" sz="1200" dirty="0">
+                <a:solidFill>
+                  <a:srgbClr val="00B050"/>
+                </a:solidFill>
+              </a:rPr>
+              <a:t>SELECT * FROM users WHERE email = ‘admin1' AND password = ‘</a:t>
+            </a:r>
+            <a:r>
+              <a:rPr lang="en-GB" sz="1200" dirty="0">
                 <a:solidFill>
                   <a:srgbClr val="FF0000"/>
                 </a:solidFill>
               </a:rPr>
-              <a:t>‘’ UNION SELECT username, password FROM users </a:t>
-            </a:r>
-            <a:r>
-              <a:rPr lang="en-GB" sz="1600" dirty="0"/>
-              <a:t>“</a:t>
+              <a:t>SQL_INJECTION</a:t>
             </a:r>
           </a:p>
           <a:p>
@@ -4257,51 +4264,21 @@
           </a:p>
         </p:txBody>
       </p:sp>
-      <p:pic>
-        <p:nvPicPr>
-          <p:cNvPr id="7" name="Picture 6">
-            <a:extLst>
-              <a:ext uri="{FF2B5EF4-FFF2-40B4-BE49-F238E27FC236}">
-                <a16:creationId xmlns:a16="http://schemas.microsoft.com/office/drawing/2014/main" id="{DB7A9D9A-DC62-5A1E-1C41-E6B809342CA4}"/>
-              </a:ext>
-            </a:extLst>
-          </p:cNvPr>
-          <p:cNvPicPr>
-            <a:picLocks noChangeAspect="1"/>
-          </p:cNvPicPr>
+      <p:sp>
+        <p:nvSpPr>
+          <p:cNvPr id="8" name="Rectangle 7">
+            <a:extLst>
+              <a:ext uri="{FF2B5EF4-FFF2-40B4-BE49-F238E27FC236}">
+                <a16:creationId xmlns:a16="http://schemas.microsoft.com/office/drawing/2014/main" id="{EE988606-73DD-7B3E-B409-E792DBEA46AA}"/>
+              </a:ext>
+            </a:extLst>
+          </p:cNvPr>
+          <p:cNvSpPr/>
           <p:nvPr/>
-        </p:nvPicPr>
-        <p:blipFill>
-          <a:blip r:embed="rId2"/>
-          <a:stretch>
-            <a:fillRect/>
-          </a:stretch>
-        </p:blipFill>
+        </p:nvSpPr>
         <p:spPr>
           <a:xfrm>
-            <a:off x="8601935" y="121686"/>
-            <a:ext cx="3420624" cy="4843604"/>
-          </a:xfrm>
-          <a:prstGeom prst="rect">
-            <a:avLst/>
-          </a:prstGeom>
-        </p:spPr>
-      </p:pic>
-      <p:sp>
-        <p:nvSpPr>
-          <p:cNvPr id="8" name="Rectangle 7">
-            <a:extLst>
-              <a:ext uri="{FF2B5EF4-FFF2-40B4-BE49-F238E27FC236}">
-                <a16:creationId xmlns:a16="http://schemas.microsoft.com/office/drawing/2014/main" id="{EE988606-73DD-7B3E-B409-E792DBEA46AA}"/>
-              </a:ext>
-            </a:extLst>
-          </p:cNvPr>
-          <p:cNvSpPr/>
-          <p:nvPr/>
-        </p:nvSpPr>
-        <p:spPr>
-          <a:xfrm>
-            <a:off x="285135" y="3429000"/>
+            <a:off x="103822" y="3545501"/>
             <a:ext cx="1917291" cy="356419"/>
           </a:xfrm>
           <a:prstGeom prst="rect">
@@ -4350,7 +4327,7 @@
         </p:nvSpPr>
         <p:spPr>
           <a:xfrm>
-            <a:off x="2428568" y="3429000"/>
+            <a:off x="2247255" y="3545501"/>
             <a:ext cx="1573161" cy="356419"/>
           </a:xfrm>
           <a:prstGeom prst="rect">
@@ -4399,7 +4376,7 @@
         </p:nvSpPr>
         <p:spPr>
           <a:xfrm>
-            <a:off x="4227871" y="3448664"/>
+            <a:off x="4046558" y="3565165"/>
             <a:ext cx="1573161" cy="356419"/>
           </a:xfrm>
           <a:prstGeom prst="rect">
@@ -4448,7 +4425,7 @@
         </p:nvSpPr>
         <p:spPr>
           <a:xfrm>
-            <a:off x="6027174" y="3458495"/>
+            <a:off x="5845861" y="3574996"/>
             <a:ext cx="1573161" cy="356419"/>
           </a:xfrm>
           <a:prstGeom prst="rect">
@@ -4497,8 +4474,8 @@
         </p:nvSpPr>
         <p:spPr>
           <a:xfrm>
-            <a:off x="285135" y="4001294"/>
-            <a:ext cx="7718323" cy="369332"/>
+            <a:off x="187396" y="4129548"/>
+            <a:ext cx="7718323" cy="400110"/>
           </a:xfrm>
           <a:prstGeom prst="rect">
             <a:avLst/>
@@ -4512,12 +4489,73 @@
           <a:lstStyle/>
           <a:p>
             <a:r>
+              <a:rPr lang="en-GB" sz="2000" b="1" dirty="0"/>
+              <a:t>Try to login as admin1</a:t>
+            </a:r>
+          </a:p>
+        </p:txBody>
+      </p:sp>
+      <p:pic>
+        <p:nvPicPr>
+          <p:cNvPr id="5" name="Picture 4">
+            <a:extLst>
+              <a:ext uri="{FF2B5EF4-FFF2-40B4-BE49-F238E27FC236}">
+                <a16:creationId xmlns:a16="http://schemas.microsoft.com/office/drawing/2014/main" id="{ACFA2040-F4DB-4690-6C8F-8BBE5CA58444}"/>
+              </a:ext>
+            </a:extLst>
+          </p:cNvPr>
+          <p:cNvPicPr>
+            <a:picLocks noChangeAspect="1"/>
+          </p:cNvPicPr>
+          <p:nvPr/>
+        </p:nvPicPr>
+        <p:blipFill>
+          <a:blip r:embed="rId2"/>
+          <a:stretch>
+            <a:fillRect/>
+          </a:stretch>
+        </p:blipFill>
+        <p:spPr>
+          <a:xfrm>
+            <a:off x="8601935" y="0"/>
+            <a:ext cx="3596952" cy="5204911"/>
+          </a:xfrm>
+          <a:prstGeom prst="rect">
+            <a:avLst/>
+          </a:prstGeom>
+        </p:spPr>
+      </p:pic>
+      <p:sp>
+        <p:nvSpPr>
+          <p:cNvPr id="6" name="TextBox 5">
+            <a:extLst>
+              <a:ext uri="{FF2B5EF4-FFF2-40B4-BE49-F238E27FC236}">
+                <a16:creationId xmlns:a16="http://schemas.microsoft.com/office/drawing/2014/main" id="{52D07CBD-43FC-232F-91CA-E479CD7BAD21}"/>
+              </a:ext>
+            </a:extLst>
+          </p:cNvPr>
+          <p:cNvSpPr txBox="1"/>
+          <p:nvPr/>
+        </p:nvSpPr>
+        <p:spPr>
+          <a:xfrm>
+            <a:off x="285135" y="4778477"/>
+            <a:ext cx="7620584" cy="646331"/>
+          </a:xfrm>
+          <a:prstGeom prst="rect">
+            <a:avLst/>
+          </a:prstGeom>
+          <a:noFill/>
+        </p:spPr>
+        <p:txBody>
+          <a:bodyPr wrap="square" rtlCol="0">
+            <a:spAutoFit/>
+          </a:bodyPr>
+          <a:lstStyle/>
+          <a:p>
+            <a:r>
               <a:rPr lang="en-GB" dirty="0"/>
-              <a:t>Condition 2 is “password = ‘’” – </a:t>
-            </a:r>
-            <a:r>
-              <a:rPr lang="en-GB" b="1" dirty="0"/>
-              <a:t>how can you make this evaluate to true</a:t>
+              <a:t>(Hint) – try thinking about extending condition 2 to include more Boolean logic</a:t>
             </a:r>
           </a:p>
         </p:txBody>
@@ -4623,10 +4661,10 @@
       </p:grpSpPr>
       <p:pic>
         <p:nvPicPr>
-          <p:cNvPr id="5" name="Picture 4">
-            <a:extLst>
-              <a:ext uri="{FF2B5EF4-FFF2-40B4-BE49-F238E27FC236}">
-                <a16:creationId xmlns:a16="http://schemas.microsoft.com/office/drawing/2014/main" id="{A00F9922-226A-6C70-670B-077C079CC72C}"/>
+          <p:cNvPr id="2" name="Picture 1">
+            <a:extLst>
+              <a:ext uri="{FF2B5EF4-FFF2-40B4-BE49-F238E27FC236}">
+                <a16:creationId xmlns:a16="http://schemas.microsoft.com/office/drawing/2014/main" id="{5FCA29DB-8DA7-4FF5-0D1D-F586EF013CED}"/>
               </a:ext>
             </a:extLst>
           </p:cNvPr>
@@ -4637,50 +4675,62 @@
         </p:nvPicPr>
         <p:blipFill>
           <a:blip r:embed="rId2"/>
+          <a:srcRect l="34780" t="9817" r="33984" b="18242"/>
           <a:stretch>
             <a:fillRect/>
           </a:stretch>
         </p:blipFill>
         <p:spPr>
           <a:xfrm>
-            <a:off x="640777" y="242258"/>
-            <a:ext cx="3772227" cy="5311600"/>
+            <a:off x="371788" y="80387"/>
+            <a:ext cx="4290647" cy="5558594"/>
           </a:xfrm>
           <a:prstGeom prst="rect">
             <a:avLst/>
           </a:prstGeom>
         </p:spPr>
       </p:pic>
-      <p:pic>
-        <p:nvPicPr>
-          <p:cNvPr id="7" name="Picture 6">
-            <a:extLst>
-              <a:ext uri="{FF2B5EF4-FFF2-40B4-BE49-F238E27FC236}">
-                <a16:creationId xmlns:a16="http://schemas.microsoft.com/office/drawing/2014/main" id="{AEA670BF-F6CB-6157-CA35-5BCC63C857EA}"/>
-              </a:ext>
-            </a:extLst>
-          </p:cNvPr>
-          <p:cNvPicPr>
-            <a:picLocks noChangeAspect="1"/>
-          </p:cNvPicPr>
+      <p:sp>
+        <p:nvSpPr>
+          <p:cNvPr id="3" name="TextBox 2">
+            <a:extLst>
+              <a:ext uri="{FF2B5EF4-FFF2-40B4-BE49-F238E27FC236}">
+                <a16:creationId xmlns:a16="http://schemas.microsoft.com/office/drawing/2014/main" id="{8C24D071-4EEE-04F5-FACC-84ED77F178A0}"/>
+              </a:ext>
+            </a:extLst>
+          </p:cNvPr>
+          <p:cNvSpPr txBox="1"/>
           <p:nvPr/>
-        </p:nvPicPr>
-        <p:blipFill>
-          <a:blip r:embed="rId3"/>
-          <a:stretch>
-            <a:fillRect/>
-          </a:stretch>
-        </p:blipFill>
+        </p:nvSpPr>
         <p:spPr>
           <a:xfrm>
-            <a:off x="5866212" y="242258"/>
-            <a:ext cx="3825572" cy="5311600"/>
+            <a:off x="6096000" y="2444126"/>
+            <a:ext cx="4200211" cy="646331"/>
           </a:xfrm>
           <a:prstGeom prst="rect">
             <a:avLst/>
           </a:prstGeom>
+          <a:noFill/>
         </p:spPr>
-      </p:pic>
+        <p:txBody>
+          <a:bodyPr wrap="square" rtlCol="0">
+            <a:spAutoFit/>
+          </a:bodyPr>
+          <a:lstStyle/>
+          <a:p>
+            <a:r>
+              <a:rPr lang="en-GB" dirty="0"/>
+              <a:t>Close the string,</a:t>
+            </a:r>
+          </a:p>
+          <a:p>
+            <a:r>
+              <a:rPr lang="en-GB" dirty="0"/>
+              <a:t>Extend the Boolean logic </a:t>
+            </a:r>
+          </a:p>
+        </p:txBody>
+      </p:sp>
     </p:spTree>
     <p:extLst>
       <p:ext uri="{BB962C8B-B14F-4D97-AF65-F5344CB8AC3E}">
@@ -4778,15 +4828,7 @@
           <a:p>
             <a:r>
               <a:rPr lang="en-GB" sz="1600" b="1" dirty="0"/>
-              <a:t>Using the form from the </a:t>
-            </a:r>
-            <a:r>
-              <a:rPr lang="en-GB" sz="1600" b="1"/>
-              <a:t>Tier page, </a:t>
-            </a:r>
-            <a:r>
-              <a:rPr lang="en-GB" sz="1600" b="1" dirty="0"/>
-              <a:t>try to delete the table called ‘users’</a:t>
+              <a:t>Using the form from the Tier page, try to delete the table called ‘users’</a:t>
             </a:r>
             <a:endParaRPr lang="en-GB" sz="1600" dirty="0"/>
           </a:p>
@@ -4802,7 +4844,7 @@
           <a:p>
             <a:r>
               <a:rPr lang="en-GB" sz="1600" dirty="0"/>
-              <a:t>For this injection, you need to execute the intended command before your injection. Use the semicolon to separate your injection:</a:t>
+              <a:t>(Hint) - For this injection, you need to execute your injection as a separate query, rather than appending to an existing query – use a semi colon to do this</a:t>
             </a:r>
           </a:p>
         </p:txBody>
@@ -5085,10 +5127,10 @@
       </p:grpSpPr>
       <p:pic>
         <p:nvPicPr>
-          <p:cNvPr id="5" name="Picture 4">
-            <a:extLst>
-              <a:ext uri="{FF2B5EF4-FFF2-40B4-BE49-F238E27FC236}">
-                <a16:creationId xmlns:a16="http://schemas.microsoft.com/office/drawing/2014/main" id="{F3D056DF-0721-1670-C2DD-FEE1955F26D4}"/>
+          <p:cNvPr id="3" name="Picture 2" descr="A screenshot of a computer&#10;&#10;AI-generated content may be incorrect.">
+            <a:extLst>
+              <a:ext uri="{FF2B5EF4-FFF2-40B4-BE49-F238E27FC236}">
+                <a16:creationId xmlns:a16="http://schemas.microsoft.com/office/drawing/2014/main" id="{988BFB2C-FC44-76FA-64A0-13B16EFBA4B6}"/>
               </a:ext>
             </a:extLst>
           </p:cNvPr>
@@ -5098,51 +5140,69 @@
           <p:nvPr/>
         </p:nvPicPr>
         <p:blipFill>
-          <a:blip r:embed="rId2"/>
+          <a:blip r:embed="rId2">
+            <a:extLst>
+              <a:ext uri="{28A0092B-C50C-407E-A947-70E740481C1C}">
+                <a14:useLocalDpi xmlns:a14="http://schemas.microsoft.com/office/drawing/2010/main" val="0"/>
+              </a:ext>
+            </a:extLst>
+          </a:blip>
+          <a:srcRect l="35110" t="34132" r="31593" b="12675"/>
           <a:stretch>
             <a:fillRect/>
           </a:stretch>
         </p:blipFill>
         <p:spPr>
           <a:xfrm>
-            <a:off x="347515" y="304901"/>
-            <a:ext cx="4598111" cy="3722685"/>
+            <a:off x="875072" y="894302"/>
+            <a:ext cx="4835202" cy="4345085"/>
           </a:xfrm>
           <a:prstGeom prst="rect">
             <a:avLst/>
           </a:prstGeom>
         </p:spPr>
       </p:pic>
-      <p:pic>
-        <p:nvPicPr>
-          <p:cNvPr id="7" name="Picture 6">
-            <a:extLst>
-              <a:ext uri="{FF2B5EF4-FFF2-40B4-BE49-F238E27FC236}">
-                <a16:creationId xmlns:a16="http://schemas.microsoft.com/office/drawing/2014/main" id="{56DDDFD9-66E9-5DD2-441A-EDE74E88E6B9}"/>
-              </a:ext>
-            </a:extLst>
-          </p:cNvPr>
-          <p:cNvPicPr>
-            <a:picLocks noChangeAspect="1"/>
-          </p:cNvPicPr>
+      <p:sp>
+        <p:nvSpPr>
+          <p:cNvPr id="4" name="TextBox 3">
+            <a:extLst>
+              <a:ext uri="{FF2B5EF4-FFF2-40B4-BE49-F238E27FC236}">
+                <a16:creationId xmlns:a16="http://schemas.microsoft.com/office/drawing/2014/main" id="{4E9BBED1-41EA-E4A1-2521-2D1EDF4F44E3}"/>
+              </a:ext>
+            </a:extLst>
+          </p:cNvPr>
+          <p:cNvSpPr txBox="1"/>
           <p:nvPr/>
-        </p:nvPicPr>
-        <p:blipFill>
-          <a:blip r:embed="rId3"/>
-          <a:stretch>
-            <a:fillRect/>
-          </a:stretch>
-        </p:blipFill>
+        </p:nvSpPr>
         <p:spPr>
           <a:xfrm>
-            <a:off x="6315695" y="2575683"/>
-            <a:ext cx="4598111" cy="3756683"/>
+            <a:off x="6260123" y="2160395"/>
+            <a:ext cx="4933741" cy="646331"/>
           </a:xfrm>
           <a:prstGeom prst="rect">
             <a:avLst/>
           </a:prstGeom>
+          <a:noFill/>
         </p:spPr>
-      </p:pic>
+        <p:txBody>
+          <a:bodyPr wrap="square" rtlCol="0">
+            <a:spAutoFit/>
+          </a:bodyPr>
+          <a:lstStyle/>
+          <a:p>
+            <a:r>
+              <a:rPr lang="en-GB" dirty="0"/>
+              <a:t>Semi colon completes the first intended query,</a:t>
+            </a:r>
+          </a:p>
+          <a:p>
+            <a:r>
+              <a:rPr lang="en-GB" dirty="0"/>
+              <a:t>Can you then inject your own</a:t>
+            </a:r>
+          </a:p>
+        </p:txBody>
+      </p:sp>
     </p:spTree>
     <p:extLst>
       <p:ext uri="{BB962C8B-B14F-4D97-AF65-F5344CB8AC3E}">
